--- a/你們要讚美耶和華(崇拜版).pptx
+++ b/你們要讚美耶和華(崇拜版).pptx
@@ -169,10 +169,9 @@
           <a:lstStyle/>
           <a:p>
             <a:r>
-              <a:rPr lang="zh-TW" altLang="en-US" smtClean="0"/>
+              <a:rPr lang="zh-TW" altLang="en-US"/>
               <a:t>按一下以編輯母片標題樣式</a:t>
             </a:r>
-            <a:endParaRPr lang="zh-TW" altLang="en-US"/>
           </a:p>
         </p:txBody>
       </p:sp>
@@ -288,10 +287,9 @@
           </a:lstStyle>
           <a:p>
             <a:r>
-              <a:rPr lang="zh-TW" altLang="en-US" smtClean="0"/>
+              <a:rPr lang="zh-TW" altLang="en-US"/>
               <a:t>按一下以編輯母片副標題樣式</a:t>
             </a:r>
-            <a:endParaRPr lang="zh-TW" altLang="en-US"/>
           </a:p>
         </p:txBody>
       </p:sp>
@@ -312,7 +310,7 @@
           <a:p>
             <a:fld id="{8E62842E-6A61-4F2C-82AE-94D62E76AD24}" type="datetimeFigureOut">
               <a:rPr lang="zh-TW" altLang="en-US" smtClean="0"/>
-              <a:t>2021/5/8</a:t>
+              <a:t>2024/8/3</a:t>
             </a:fld>
             <a:endParaRPr lang="zh-TW" altLang="en-US"/>
           </a:p>
@@ -401,10 +399,9 @@
           <a:lstStyle/>
           <a:p>
             <a:r>
-              <a:rPr lang="zh-TW" altLang="en-US" smtClean="0"/>
+              <a:rPr lang="zh-TW" altLang="en-US"/>
               <a:t>按一下以編輯母片標題樣式</a:t>
             </a:r>
-            <a:endParaRPr lang="zh-TW" altLang="en-US"/>
           </a:p>
         </p:txBody>
       </p:sp>
@@ -425,38 +422,37 @@
           <a:p>
             <a:pPr lvl="0"/>
             <a:r>
-              <a:rPr lang="zh-TW" altLang="en-US" smtClean="0"/>
+              <a:rPr lang="zh-TW" altLang="en-US"/>
               <a:t>按一下以編輯母片文字樣式</a:t>
             </a:r>
           </a:p>
           <a:p>
             <a:pPr lvl="1"/>
             <a:r>
-              <a:rPr lang="zh-TW" altLang="en-US" smtClean="0"/>
+              <a:rPr lang="zh-TW" altLang="en-US"/>
               <a:t>第二層</a:t>
             </a:r>
           </a:p>
           <a:p>
             <a:pPr lvl="2"/>
             <a:r>
-              <a:rPr lang="zh-TW" altLang="en-US" smtClean="0"/>
+              <a:rPr lang="zh-TW" altLang="en-US"/>
               <a:t>第三層</a:t>
             </a:r>
           </a:p>
           <a:p>
             <a:pPr lvl="3"/>
             <a:r>
-              <a:rPr lang="zh-TW" altLang="en-US" smtClean="0"/>
+              <a:rPr lang="zh-TW" altLang="en-US"/>
               <a:t>第四層</a:t>
             </a:r>
           </a:p>
           <a:p>
             <a:pPr lvl="4"/>
             <a:r>
-              <a:rPr lang="zh-TW" altLang="en-US" smtClean="0"/>
+              <a:rPr lang="zh-TW" altLang="en-US"/>
               <a:t>第五層</a:t>
             </a:r>
-            <a:endParaRPr lang="zh-TW" altLang="en-US"/>
           </a:p>
         </p:txBody>
       </p:sp>
@@ -477,7 +473,7 @@
           <a:p>
             <a:fld id="{8E62842E-6A61-4F2C-82AE-94D62E76AD24}" type="datetimeFigureOut">
               <a:rPr lang="zh-TW" altLang="en-US" smtClean="0"/>
-              <a:t>2021/5/8</a:t>
+              <a:t>2024/8/3</a:t>
             </a:fld>
             <a:endParaRPr lang="zh-TW" altLang="en-US"/>
           </a:p>
@@ -571,10 +567,9 @@
           <a:lstStyle/>
           <a:p>
             <a:r>
-              <a:rPr lang="zh-TW" altLang="en-US" smtClean="0"/>
+              <a:rPr lang="zh-TW" altLang="en-US"/>
               <a:t>按一下以編輯母片標題樣式</a:t>
             </a:r>
-            <a:endParaRPr lang="zh-TW" altLang="en-US"/>
           </a:p>
         </p:txBody>
       </p:sp>
@@ -600,38 +595,37 @@
           <a:p>
             <a:pPr lvl="0"/>
             <a:r>
-              <a:rPr lang="zh-TW" altLang="en-US" smtClean="0"/>
+              <a:rPr lang="zh-TW" altLang="en-US"/>
               <a:t>按一下以編輯母片文字樣式</a:t>
             </a:r>
           </a:p>
           <a:p>
             <a:pPr lvl="1"/>
             <a:r>
-              <a:rPr lang="zh-TW" altLang="en-US" smtClean="0"/>
+              <a:rPr lang="zh-TW" altLang="en-US"/>
               <a:t>第二層</a:t>
             </a:r>
           </a:p>
           <a:p>
             <a:pPr lvl="2"/>
             <a:r>
-              <a:rPr lang="zh-TW" altLang="en-US" smtClean="0"/>
+              <a:rPr lang="zh-TW" altLang="en-US"/>
               <a:t>第三層</a:t>
             </a:r>
           </a:p>
           <a:p>
             <a:pPr lvl="3"/>
             <a:r>
-              <a:rPr lang="zh-TW" altLang="en-US" smtClean="0"/>
+              <a:rPr lang="zh-TW" altLang="en-US"/>
               <a:t>第四層</a:t>
             </a:r>
           </a:p>
           <a:p>
             <a:pPr lvl="4"/>
             <a:r>
-              <a:rPr lang="zh-TW" altLang="en-US" smtClean="0"/>
+              <a:rPr lang="zh-TW" altLang="en-US"/>
               <a:t>第五層</a:t>
             </a:r>
-            <a:endParaRPr lang="zh-TW" altLang="en-US"/>
           </a:p>
         </p:txBody>
       </p:sp>
@@ -652,7 +646,7 @@
           <a:p>
             <a:fld id="{8E62842E-6A61-4F2C-82AE-94D62E76AD24}" type="datetimeFigureOut">
               <a:rPr lang="zh-TW" altLang="en-US" smtClean="0"/>
-              <a:t>2021/5/8</a:t>
+              <a:t>2024/8/3</a:t>
             </a:fld>
             <a:endParaRPr lang="zh-TW" altLang="en-US"/>
           </a:p>
@@ -741,10 +735,9 @@
           <a:lstStyle/>
           <a:p>
             <a:r>
-              <a:rPr lang="zh-TW" altLang="en-US" smtClean="0"/>
+              <a:rPr lang="zh-TW" altLang="en-US"/>
               <a:t>按一下以編輯母片標題樣式</a:t>
             </a:r>
-            <a:endParaRPr lang="zh-TW" altLang="en-US"/>
           </a:p>
         </p:txBody>
       </p:sp>
@@ -765,38 +758,37 @@
           <a:p>
             <a:pPr lvl="0"/>
             <a:r>
-              <a:rPr lang="zh-TW" altLang="en-US" smtClean="0"/>
+              <a:rPr lang="zh-TW" altLang="en-US"/>
               <a:t>按一下以編輯母片文字樣式</a:t>
             </a:r>
           </a:p>
           <a:p>
             <a:pPr lvl="1"/>
             <a:r>
-              <a:rPr lang="zh-TW" altLang="en-US" smtClean="0"/>
+              <a:rPr lang="zh-TW" altLang="en-US"/>
               <a:t>第二層</a:t>
             </a:r>
           </a:p>
           <a:p>
             <a:pPr lvl="2"/>
             <a:r>
-              <a:rPr lang="zh-TW" altLang="en-US" smtClean="0"/>
+              <a:rPr lang="zh-TW" altLang="en-US"/>
               <a:t>第三層</a:t>
             </a:r>
           </a:p>
           <a:p>
             <a:pPr lvl="3"/>
             <a:r>
-              <a:rPr lang="zh-TW" altLang="en-US" smtClean="0"/>
+              <a:rPr lang="zh-TW" altLang="en-US"/>
               <a:t>第四層</a:t>
             </a:r>
           </a:p>
           <a:p>
             <a:pPr lvl="4"/>
             <a:r>
-              <a:rPr lang="zh-TW" altLang="en-US" smtClean="0"/>
+              <a:rPr lang="zh-TW" altLang="en-US"/>
               <a:t>第五層</a:t>
             </a:r>
-            <a:endParaRPr lang="zh-TW" altLang="en-US"/>
           </a:p>
         </p:txBody>
       </p:sp>
@@ -817,7 +809,7 @@
           <a:p>
             <a:fld id="{8E62842E-6A61-4F2C-82AE-94D62E76AD24}" type="datetimeFigureOut">
               <a:rPr lang="zh-TW" altLang="en-US" smtClean="0"/>
-              <a:t>2021/5/8</a:t>
+              <a:t>2024/8/3</a:t>
             </a:fld>
             <a:endParaRPr lang="zh-TW" altLang="en-US"/>
           </a:p>
@@ -915,10 +907,9 @@
           </a:lstStyle>
           <a:p>
             <a:r>
-              <a:rPr lang="zh-TW" altLang="en-US" smtClean="0"/>
+              <a:rPr lang="zh-TW" altLang="en-US"/>
               <a:t>按一下以編輯母片標題樣式</a:t>
             </a:r>
-            <a:endParaRPr lang="zh-TW" altLang="en-US"/>
           </a:p>
         </p:txBody>
       </p:sp>
@@ -1035,7 +1026,7 @@
           <a:p>
             <a:pPr lvl="0"/>
             <a:r>
-              <a:rPr lang="zh-TW" altLang="en-US" smtClean="0"/>
+              <a:rPr lang="zh-TW" altLang="en-US"/>
               <a:t>按一下以編輯母片文字樣式</a:t>
             </a:r>
           </a:p>
@@ -1058,7 +1049,7 @@
           <a:p>
             <a:fld id="{8E62842E-6A61-4F2C-82AE-94D62E76AD24}" type="datetimeFigureOut">
               <a:rPr lang="zh-TW" altLang="en-US" smtClean="0"/>
-              <a:t>2021/5/8</a:t>
+              <a:t>2024/8/3</a:t>
             </a:fld>
             <a:endParaRPr lang="zh-TW" altLang="en-US"/>
           </a:p>
@@ -1147,10 +1138,9 @@
           <a:lstStyle/>
           <a:p>
             <a:r>
-              <a:rPr lang="zh-TW" altLang="en-US" smtClean="0"/>
+              <a:rPr lang="zh-TW" altLang="en-US"/>
               <a:t>按一下以編輯母片標題樣式</a:t>
             </a:r>
-            <a:endParaRPr lang="zh-TW" altLang="en-US"/>
           </a:p>
         </p:txBody>
       </p:sp>
@@ -1204,38 +1194,37 @@
           <a:p>
             <a:pPr lvl="0"/>
             <a:r>
-              <a:rPr lang="zh-TW" altLang="en-US" smtClean="0"/>
+              <a:rPr lang="zh-TW" altLang="en-US"/>
               <a:t>按一下以編輯母片文字樣式</a:t>
             </a:r>
           </a:p>
           <a:p>
             <a:pPr lvl="1"/>
             <a:r>
-              <a:rPr lang="zh-TW" altLang="en-US" smtClean="0"/>
+              <a:rPr lang="zh-TW" altLang="en-US"/>
               <a:t>第二層</a:t>
             </a:r>
           </a:p>
           <a:p>
             <a:pPr lvl="2"/>
             <a:r>
-              <a:rPr lang="zh-TW" altLang="en-US" smtClean="0"/>
+              <a:rPr lang="zh-TW" altLang="en-US"/>
               <a:t>第三層</a:t>
             </a:r>
           </a:p>
           <a:p>
             <a:pPr lvl="3"/>
             <a:r>
-              <a:rPr lang="zh-TW" altLang="en-US" smtClean="0"/>
+              <a:rPr lang="zh-TW" altLang="en-US"/>
               <a:t>第四層</a:t>
             </a:r>
           </a:p>
           <a:p>
             <a:pPr lvl="4"/>
             <a:r>
-              <a:rPr lang="zh-TW" altLang="en-US" smtClean="0"/>
+              <a:rPr lang="zh-TW" altLang="en-US"/>
               <a:t>第五層</a:t>
             </a:r>
-            <a:endParaRPr lang="zh-TW" altLang="en-US"/>
           </a:p>
         </p:txBody>
       </p:sp>
@@ -1289,38 +1278,37 @@
           <a:p>
             <a:pPr lvl="0"/>
             <a:r>
-              <a:rPr lang="zh-TW" altLang="en-US" smtClean="0"/>
+              <a:rPr lang="zh-TW" altLang="en-US"/>
               <a:t>按一下以編輯母片文字樣式</a:t>
             </a:r>
           </a:p>
           <a:p>
             <a:pPr lvl="1"/>
             <a:r>
-              <a:rPr lang="zh-TW" altLang="en-US" smtClean="0"/>
+              <a:rPr lang="zh-TW" altLang="en-US"/>
               <a:t>第二層</a:t>
             </a:r>
           </a:p>
           <a:p>
             <a:pPr lvl="2"/>
             <a:r>
-              <a:rPr lang="zh-TW" altLang="en-US" smtClean="0"/>
+              <a:rPr lang="zh-TW" altLang="en-US"/>
               <a:t>第三層</a:t>
             </a:r>
           </a:p>
           <a:p>
             <a:pPr lvl="3"/>
             <a:r>
-              <a:rPr lang="zh-TW" altLang="en-US" smtClean="0"/>
+              <a:rPr lang="zh-TW" altLang="en-US"/>
               <a:t>第四層</a:t>
             </a:r>
           </a:p>
           <a:p>
             <a:pPr lvl="4"/>
             <a:r>
-              <a:rPr lang="zh-TW" altLang="en-US" smtClean="0"/>
+              <a:rPr lang="zh-TW" altLang="en-US"/>
               <a:t>第五層</a:t>
             </a:r>
-            <a:endParaRPr lang="zh-TW" altLang="en-US"/>
           </a:p>
         </p:txBody>
       </p:sp>
@@ -1341,7 +1329,7 @@
           <a:p>
             <a:fld id="{8E62842E-6A61-4F2C-82AE-94D62E76AD24}" type="datetimeFigureOut">
               <a:rPr lang="zh-TW" altLang="en-US" smtClean="0"/>
-              <a:t>2021/5/8</a:t>
+              <a:t>2024/8/3</a:t>
             </a:fld>
             <a:endParaRPr lang="zh-TW" altLang="en-US"/>
           </a:p>
@@ -1434,10 +1422,9 @@
           </a:lstStyle>
           <a:p>
             <a:r>
-              <a:rPr lang="zh-TW" altLang="en-US" smtClean="0"/>
+              <a:rPr lang="zh-TW" altLang="en-US"/>
               <a:t>按一下以編輯母片標題樣式</a:t>
             </a:r>
-            <a:endParaRPr lang="zh-TW" altLang="en-US"/>
           </a:p>
         </p:txBody>
       </p:sp>
@@ -1500,7 +1487,7 @@
           <a:p>
             <a:pPr lvl="0"/>
             <a:r>
-              <a:rPr lang="zh-TW" altLang="en-US" smtClean="0"/>
+              <a:rPr lang="zh-TW" altLang="en-US"/>
               <a:t>按一下以編輯母片文字樣式</a:t>
             </a:r>
           </a:p>
@@ -1556,38 +1543,37 @@
           <a:p>
             <a:pPr lvl="0"/>
             <a:r>
-              <a:rPr lang="zh-TW" altLang="en-US" smtClean="0"/>
+              <a:rPr lang="zh-TW" altLang="en-US"/>
               <a:t>按一下以編輯母片文字樣式</a:t>
             </a:r>
           </a:p>
           <a:p>
             <a:pPr lvl="1"/>
             <a:r>
-              <a:rPr lang="zh-TW" altLang="en-US" smtClean="0"/>
+              <a:rPr lang="zh-TW" altLang="en-US"/>
               <a:t>第二層</a:t>
             </a:r>
           </a:p>
           <a:p>
             <a:pPr lvl="2"/>
             <a:r>
-              <a:rPr lang="zh-TW" altLang="en-US" smtClean="0"/>
+              <a:rPr lang="zh-TW" altLang="en-US"/>
               <a:t>第三層</a:t>
             </a:r>
           </a:p>
           <a:p>
             <a:pPr lvl="3"/>
             <a:r>
-              <a:rPr lang="zh-TW" altLang="en-US" smtClean="0"/>
+              <a:rPr lang="zh-TW" altLang="en-US"/>
               <a:t>第四層</a:t>
             </a:r>
           </a:p>
           <a:p>
             <a:pPr lvl="4"/>
             <a:r>
-              <a:rPr lang="zh-TW" altLang="en-US" smtClean="0"/>
+              <a:rPr lang="zh-TW" altLang="en-US"/>
               <a:t>第五層</a:t>
             </a:r>
-            <a:endParaRPr lang="zh-TW" altLang="en-US"/>
           </a:p>
         </p:txBody>
       </p:sp>
@@ -1650,7 +1636,7 @@
           <a:p>
             <a:pPr lvl="0"/>
             <a:r>
-              <a:rPr lang="zh-TW" altLang="en-US" smtClean="0"/>
+              <a:rPr lang="zh-TW" altLang="en-US"/>
               <a:t>按一下以編輯母片文字樣式</a:t>
             </a:r>
           </a:p>
@@ -1706,38 +1692,37 @@
           <a:p>
             <a:pPr lvl="0"/>
             <a:r>
-              <a:rPr lang="zh-TW" altLang="en-US" smtClean="0"/>
+              <a:rPr lang="zh-TW" altLang="en-US"/>
               <a:t>按一下以編輯母片文字樣式</a:t>
             </a:r>
           </a:p>
           <a:p>
             <a:pPr lvl="1"/>
             <a:r>
-              <a:rPr lang="zh-TW" altLang="en-US" smtClean="0"/>
+              <a:rPr lang="zh-TW" altLang="en-US"/>
               <a:t>第二層</a:t>
             </a:r>
           </a:p>
           <a:p>
             <a:pPr lvl="2"/>
             <a:r>
-              <a:rPr lang="zh-TW" altLang="en-US" smtClean="0"/>
+              <a:rPr lang="zh-TW" altLang="en-US"/>
               <a:t>第三層</a:t>
             </a:r>
           </a:p>
           <a:p>
             <a:pPr lvl="3"/>
             <a:r>
-              <a:rPr lang="zh-TW" altLang="en-US" smtClean="0"/>
+              <a:rPr lang="zh-TW" altLang="en-US"/>
               <a:t>第四層</a:t>
             </a:r>
           </a:p>
           <a:p>
             <a:pPr lvl="4"/>
             <a:r>
-              <a:rPr lang="zh-TW" altLang="en-US" smtClean="0"/>
+              <a:rPr lang="zh-TW" altLang="en-US"/>
               <a:t>第五層</a:t>
             </a:r>
-            <a:endParaRPr lang="zh-TW" altLang="en-US"/>
           </a:p>
         </p:txBody>
       </p:sp>
@@ -1758,7 +1743,7 @@
           <a:p>
             <a:fld id="{8E62842E-6A61-4F2C-82AE-94D62E76AD24}" type="datetimeFigureOut">
               <a:rPr lang="zh-TW" altLang="en-US" smtClean="0"/>
-              <a:t>2021/5/8</a:t>
+              <a:t>2024/8/3</a:t>
             </a:fld>
             <a:endParaRPr lang="zh-TW" altLang="en-US"/>
           </a:p>
@@ -1847,10 +1832,9 @@
           <a:lstStyle/>
           <a:p>
             <a:r>
-              <a:rPr lang="zh-TW" altLang="en-US" smtClean="0"/>
+              <a:rPr lang="zh-TW" altLang="en-US"/>
               <a:t>按一下以編輯母片標題樣式</a:t>
             </a:r>
-            <a:endParaRPr lang="zh-TW" altLang="en-US"/>
           </a:p>
         </p:txBody>
       </p:sp>
@@ -1871,7 +1855,7 @@
           <a:p>
             <a:fld id="{8E62842E-6A61-4F2C-82AE-94D62E76AD24}" type="datetimeFigureOut">
               <a:rPr lang="zh-TW" altLang="en-US" smtClean="0"/>
-              <a:t>2021/5/8</a:t>
+              <a:t>2024/8/3</a:t>
             </a:fld>
             <a:endParaRPr lang="zh-TW" altLang="en-US"/>
           </a:p>
@@ -1961,7 +1945,7 @@
           <a:p>
             <a:fld id="{8E62842E-6A61-4F2C-82AE-94D62E76AD24}" type="datetimeFigureOut">
               <a:rPr lang="zh-TW" altLang="en-US" smtClean="0"/>
-              <a:t>2021/5/8</a:t>
+              <a:t>2024/8/3</a:t>
             </a:fld>
             <a:endParaRPr lang="zh-TW" altLang="en-US"/>
           </a:p>
@@ -2059,10 +2043,9 @@
           </a:lstStyle>
           <a:p>
             <a:r>
-              <a:rPr lang="zh-TW" altLang="en-US" smtClean="0"/>
+              <a:rPr lang="zh-TW" altLang="en-US"/>
               <a:t>按一下以編輯母片標題樣式</a:t>
             </a:r>
-            <a:endParaRPr lang="zh-TW" altLang="en-US"/>
           </a:p>
         </p:txBody>
       </p:sp>
@@ -2116,38 +2099,37 @@
           <a:p>
             <a:pPr lvl="0"/>
             <a:r>
-              <a:rPr lang="zh-TW" altLang="en-US" smtClean="0"/>
+              <a:rPr lang="zh-TW" altLang="en-US"/>
               <a:t>按一下以編輯母片文字樣式</a:t>
             </a:r>
           </a:p>
           <a:p>
             <a:pPr lvl="1"/>
             <a:r>
-              <a:rPr lang="zh-TW" altLang="en-US" smtClean="0"/>
+              <a:rPr lang="zh-TW" altLang="en-US"/>
               <a:t>第二層</a:t>
             </a:r>
           </a:p>
           <a:p>
             <a:pPr lvl="2"/>
             <a:r>
-              <a:rPr lang="zh-TW" altLang="en-US" smtClean="0"/>
+              <a:rPr lang="zh-TW" altLang="en-US"/>
               <a:t>第三層</a:t>
             </a:r>
           </a:p>
           <a:p>
             <a:pPr lvl="3"/>
             <a:r>
-              <a:rPr lang="zh-TW" altLang="en-US" smtClean="0"/>
+              <a:rPr lang="zh-TW" altLang="en-US"/>
               <a:t>第四層</a:t>
             </a:r>
           </a:p>
           <a:p>
             <a:pPr lvl="4"/>
             <a:r>
-              <a:rPr lang="zh-TW" altLang="en-US" smtClean="0"/>
+              <a:rPr lang="zh-TW" altLang="en-US"/>
               <a:t>第五層</a:t>
             </a:r>
-            <a:endParaRPr lang="zh-TW" altLang="en-US"/>
           </a:p>
         </p:txBody>
       </p:sp>
@@ -2210,7 +2192,7 @@
           <a:p>
             <a:pPr lvl="0"/>
             <a:r>
-              <a:rPr lang="zh-TW" altLang="en-US" smtClean="0"/>
+              <a:rPr lang="zh-TW" altLang="en-US"/>
               <a:t>按一下以編輯母片文字樣式</a:t>
             </a:r>
           </a:p>
@@ -2233,7 +2215,7 @@
           <a:p>
             <a:fld id="{8E62842E-6A61-4F2C-82AE-94D62E76AD24}" type="datetimeFigureOut">
               <a:rPr lang="zh-TW" altLang="en-US" smtClean="0"/>
-              <a:t>2021/5/8</a:t>
+              <a:t>2024/8/3</a:t>
             </a:fld>
             <a:endParaRPr lang="zh-TW" altLang="en-US"/>
           </a:p>
@@ -2331,10 +2313,9 @@
           </a:lstStyle>
           <a:p>
             <a:r>
-              <a:rPr lang="zh-TW" altLang="en-US" smtClean="0"/>
+              <a:rPr lang="zh-TW" altLang="en-US"/>
               <a:t>按一下以編輯母片標題樣式</a:t>
             </a:r>
-            <a:endParaRPr lang="zh-TW" altLang="en-US"/>
           </a:p>
         </p:txBody>
       </p:sp>
@@ -2396,10 +2377,9 @@
           </a:lstStyle>
           <a:p>
             <a:r>
-              <a:rPr lang="zh-TW" altLang="en-US" smtClean="0"/>
+              <a:rPr lang="zh-TW" altLang="en-US"/>
               <a:t>按一下圖示以新增圖片</a:t>
             </a:r>
-            <a:endParaRPr lang="zh-TW" altLang="en-US"/>
           </a:p>
         </p:txBody>
       </p:sp>
@@ -2462,7 +2442,7 @@
           <a:p>
             <a:pPr lvl="0"/>
             <a:r>
-              <a:rPr lang="zh-TW" altLang="en-US" smtClean="0"/>
+              <a:rPr lang="zh-TW" altLang="en-US"/>
               <a:t>按一下以編輯母片文字樣式</a:t>
             </a:r>
           </a:p>
@@ -2485,7 +2465,7 @@
           <a:p>
             <a:fld id="{8E62842E-6A61-4F2C-82AE-94D62E76AD24}" type="datetimeFigureOut">
               <a:rPr lang="zh-TW" altLang="en-US" smtClean="0"/>
-              <a:t>2021/5/8</a:t>
+              <a:t>2024/8/3</a:t>
             </a:fld>
             <a:endParaRPr lang="zh-TW" altLang="en-US"/>
           </a:p>
@@ -2594,10 +2574,9 @@
           <a:lstStyle/>
           <a:p>
             <a:r>
-              <a:rPr lang="zh-TW" altLang="en-US" smtClean="0"/>
+              <a:rPr lang="zh-TW" altLang="en-US"/>
               <a:t>按一下以編輯母片標題樣式</a:t>
             </a:r>
-            <a:endParaRPr lang="zh-TW" altLang="en-US"/>
           </a:p>
         </p:txBody>
       </p:sp>
@@ -2628,38 +2607,37 @@
           <a:p>
             <a:pPr lvl="0"/>
             <a:r>
-              <a:rPr lang="zh-TW" altLang="en-US" smtClean="0"/>
+              <a:rPr lang="zh-TW" altLang="en-US"/>
               <a:t>按一下以編輯母片文字樣式</a:t>
             </a:r>
           </a:p>
           <a:p>
             <a:pPr lvl="1"/>
             <a:r>
-              <a:rPr lang="zh-TW" altLang="en-US" smtClean="0"/>
+              <a:rPr lang="zh-TW" altLang="en-US"/>
               <a:t>第二層</a:t>
             </a:r>
           </a:p>
           <a:p>
             <a:pPr lvl="2"/>
             <a:r>
-              <a:rPr lang="zh-TW" altLang="en-US" smtClean="0"/>
+              <a:rPr lang="zh-TW" altLang="en-US"/>
               <a:t>第三層</a:t>
             </a:r>
           </a:p>
           <a:p>
             <a:pPr lvl="3"/>
             <a:r>
-              <a:rPr lang="zh-TW" altLang="en-US" smtClean="0"/>
+              <a:rPr lang="zh-TW" altLang="en-US"/>
               <a:t>第四層</a:t>
             </a:r>
           </a:p>
           <a:p>
             <a:pPr lvl="4"/>
             <a:r>
-              <a:rPr lang="zh-TW" altLang="en-US" smtClean="0"/>
+              <a:rPr lang="zh-TW" altLang="en-US"/>
               <a:t>第五層</a:t>
             </a:r>
-            <a:endParaRPr lang="zh-TW" altLang="en-US"/>
           </a:p>
         </p:txBody>
       </p:sp>
@@ -2698,7 +2676,7 @@
           <a:p>
             <a:fld id="{8E62842E-6A61-4F2C-82AE-94D62E76AD24}" type="datetimeFigureOut">
               <a:rPr lang="zh-TW" altLang="en-US" smtClean="0"/>
-              <a:t>2021/5/8</a:t>
+              <a:t>2024/8/3</a:t>
             </a:fld>
             <a:endParaRPr lang="zh-TW" altLang="en-US"/>
           </a:p>
@@ -3105,24 +3083,7 @@
                 <a:latin typeface="微軟正黑體" pitchFamily="34" charset="-120"/>
                 <a:ea typeface="微軟正黑體" pitchFamily="34" charset="-120"/>
               </a:rPr>
-              <a:t>你</a:t>
-            </a:r>
-            <a:r>
-              <a:rPr lang="zh-TW" altLang="en-US" sz="7200" b="1" i="1" dirty="0">
-                <a:solidFill>
-                  <a:srgbClr val="660033"/>
-                </a:solidFill>
-                <a:effectLst>
-                  <a:outerShdw blurRad="38100" dist="38100" dir="2700000" algn="tl">
-                    <a:srgbClr val="000000">
-                      <a:alpha val="43137"/>
-                    </a:srgbClr>
-                  </a:outerShdw>
-                </a:effectLst>
-                <a:latin typeface="微軟正黑體" pitchFamily="34" charset="-120"/>
-                <a:ea typeface="微軟正黑體" pitchFamily="34" charset="-120"/>
-              </a:rPr>
-              <a:t>們要讚美耶和華</a:t>
+              <a:t>你們要讚美耶和華</a:t>
             </a:r>
           </a:p>
         </p:txBody>
@@ -3207,13 +3168,6 @@
               </a:rPr>
               <a:t>在祂的聖所讚美祂</a:t>
             </a:r>
-            <a:endParaRPr lang="zh-TW" altLang="en-US" sz="6400" b="1" dirty="0">
-              <a:solidFill>
-                <a:srgbClr val="660033"/>
-              </a:solidFill>
-              <a:latin typeface="微軟正黑體" pitchFamily="34" charset="-120"/>
-              <a:ea typeface="微軟正黑體" pitchFamily="34" charset="-120"/>
-            </a:endParaRPr>
           </a:p>
         </p:txBody>
       </p:sp>
@@ -3226,7 +3180,7 @@
         <p:spPr>
           <a:xfrm>
             <a:off x="0" y="5061182"/>
-            <a:ext cx="12192000" cy="830997"/>
+            <a:ext cx="12192000" cy="646331"/>
           </a:xfrm>
           <a:prstGeom prst="rect">
             <a:avLst/>
@@ -3241,17 +3195,40 @@
           <a:p>
             <a:pPr algn="ctr"/>
             <a:r>
-              <a:rPr lang="en-US" sz="4800" b="1" dirty="0">
+              <a:rPr lang="en-US" sz="3600" b="1" dirty="0">
                 <a:solidFill>
                   <a:srgbClr val="660033"/>
                 </a:solidFill>
+                <a:latin typeface="Microsoft JhengHei" panose="020B0604030504040204" pitchFamily="34" charset="-120"/>
+                <a:ea typeface="Microsoft JhengHei" panose="020B0604030504040204" pitchFamily="34" charset="-120"/>
               </a:rPr>
-              <a:t>( 1 )</a:t>
-            </a:r>
-            <a:endParaRPr lang="vi-VN" sz="4800" b="1" dirty="0">
+              <a:t>( </a:t>
+            </a:r>
+            <a:r>
+              <a:rPr lang="zh-CN" altLang="en-US" sz="3600" b="1" dirty="0">
+                <a:solidFill>
+                  <a:srgbClr val="660033"/>
+                </a:solidFill>
+                <a:latin typeface="Microsoft JhengHei" panose="020B0604030504040204" pitchFamily="34" charset="-120"/>
+                <a:ea typeface="Microsoft JhengHei" panose="020B0604030504040204" pitchFamily="34" charset="-120"/>
+              </a:rPr>
+              <a:t>正歌 </a:t>
+            </a:r>
+            <a:r>
+              <a:rPr lang="en-US" sz="3600" b="1" dirty="0">
+                <a:solidFill>
+                  <a:srgbClr val="660033"/>
+                </a:solidFill>
+                <a:latin typeface="Microsoft JhengHei" panose="020B0604030504040204" pitchFamily="34" charset="-120"/>
+                <a:ea typeface="Microsoft JhengHei" panose="020B0604030504040204" pitchFamily="34" charset="-120"/>
+              </a:rPr>
+              <a:t>1 )</a:t>
+            </a:r>
+            <a:endParaRPr lang="vi-VN" sz="3600" b="1" dirty="0">
               <a:solidFill>
                 <a:srgbClr val="660033"/>
               </a:solidFill>
+              <a:ea typeface="Microsoft JhengHei" panose="020B0604030504040204" pitchFamily="34" charset="-120"/>
             </a:endParaRPr>
           </a:p>
         </p:txBody>
@@ -3336,13 +3313,6 @@
               </a:rPr>
               <a:t>在祂的穹蒼讚美祂</a:t>
             </a:r>
-            <a:endParaRPr lang="zh-TW" altLang="en-US" sz="6400" b="1" dirty="0">
-              <a:solidFill>
-                <a:srgbClr val="660033"/>
-              </a:solidFill>
-              <a:latin typeface="微軟正黑體" pitchFamily="34" charset="-120"/>
-              <a:ea typeface="微軟正黑體" pitchFamily="34" charset="-120"/>
-            </a:endParaRPr>
           </a:p>
         </p:txBody>
       </p:sp>
@@ -3355,7 +3325,7 @@
         <p:spPr>
           <a:xfrm>
             <a:off x="0" y="5061182"/>
-            <a:ext cx="12192000" cy="830997"/>
+            <a:ext cx="12192000" cy="646331"/>
           </a:xfrm>
           <a:prstGeom prst="rect">
             <a:avLst/>
@@ -3370,17 +3340,40 @@
           <a:p>
             <a:pPr algn="ctr"/>
             <a:r>
-              <a:rPr lang="en-US" sz="4800" b="1" dirty="0">
+              <a:rPr lang="en-US" sz="3600" b="1" dirty="0">
                 <a:solidFill>
                   <a:srgbClr val="660033"/>
                 </a:solidFill>
+                <a:latin typeface="Microsoft JhengHei" panose="020B0604030504040204" pitchFamily="34" charset="-120"/>
+                <a:ea typeface="Microsoft JhengHei" panose="020B0604030504040204" pitchFamily="34" charset="-120"/>
               </a:rPr>
-              <a:t>( 1 )</a:t>
-            </a:r>
-            <a:endParaRPr lang="vi-VN" sz="4800" b="1" dirty="0">
+              <a:t>( </a:t>
+            </a:r>
+            <a:r>
+              <a:rPr lang="zh-CN" altLang="en-US" sz="3600" b="1" dirty="0">
+                <a:solidFill>
+                  <a:srgbClr val="660033"/>
+                </a:solidFill>
+                <a:latin typeface="Microsoft JhengHei" panose="020B0604030504040204" pitchFamily="34" charset="-120"/>
+                <a:ea typeface="Microsoft JhengHei" panose="020B0604030504040204" pitchFamily="34" charset="-120"/>
+              </a:rPr>
+              <a:t>正歌 </a:t>
+            </a:r>
+            <a:r>
+              <a:rPr lang="en-US" sz="3600" b="1" dirty="0">
+                <a:solidFill>
+                  <a:srgbClr val="660033"/>
+                </a:solidFill>
+                <a:latin typeface="Microsoft JhengHei" panose="020B0604030504040204" pitchFamily="34" charset="-120"/>
+                <a:ea typeface="Microsoft JhengHei" panose="020B0604030504040204" pitchFamily="34" charset="-120"/>
+              </a:rPr>
+              <a:t>1 )</a:t>
+            </a:r>
+            <a:endParaRPr lang="vi-VN" sz="3600" b="1" dirty="0">
               <a:solidFill>
                 <a:srgbClr val="660033"/>
               </a:solidFill>
+              <a:ea typeface="Microsoft JhengHei" panose="020B0604030504040204" pitchFamily="34" charset="-120"/>
             </a:endParaRPr>
           </a:p>
         </p:txBody>
@@ -3465,13 +3458,6 @@
               </a:rPr>
               <a:t>要因著祂的榮耀讚美祂</a:t>
             </a:r>
-            <a:endParaRPr lang="zh-TW" altLang="en-US" sz="6400" b="1" dirty="0">
-              <a:solidFill>
-                <a:srgbClr val="660033"/>
-              </a:solidFill>
-              <a:latin typeface="微軟正黑體" pitchFamily="34" charset="-120"/>
-              <a:ea typeface="微軟正黑體" pitchFamily="34" charset="-120"/>
-            </a:endParaRPr>
           </a:p>
         </p:txBody>
       </p:sp>
@@ -3484,7 +3470,7 @@
         <p:spPr>
           <a:xfrm>
             <a:off x="0" y="5061182"/>
-            <a:ext cx="12192000" cy="830997"/>
+            <a:ext cx="12192000" cy="646331"/>
           </a:xfrm>
           <a:prstGeom prst="rect">
             <a:avLst/>
@@ -3499,17 +3485,40 @@
           <a:p>
             <a:pPr algn="ctr"/>
             <a:r>
-              <a:rPr lang="en-US" sz="4800" b="1" dirty="0">
+              <a:rPr lang="en-US" sz="3600" b="1" dirty="0">
                 <a:solidFill>
                   <a:srgbClr val="660033"/>
                 </a:solidFill>
+                <a:latin typeface="Microsoft JhengHei" panose="020B0604030504040204" pitchFamily="34" charset="-120"/>
+                <a:ea typeface="Microsoft JhengHei" panose="020B0604030504040204" pitchFamily="34" charset="-120"/>
               </a:rPr>
-              <a:t>( 1 )</a:t>
-            </a:r>
-            <a:endParaRPr lang="vi-VN" sz="4800" b="1" dirty="0">
+              <a:t>( </a:t>
+            </a:r>
+            <a:r>
+              <a:rPr lang="zh-CN" altLang="en-US" sz="3600" b="1" dirty="0">
+                <a:solidFill>
+                  <a:srgbClr val="660033"/>
+                </a:solidFill>
+                <a:latin typeface="Microsoft JhengHei" panose="020B0604030504040204" pitchFamily="34" charset="-120"/>
+                <a:ea typeface="Microsoft JhengHei" panose="020B0604030504040204" pitchFamily="34" charset="-120"/>
+              </a:rPr>
+              <a:t>副歌 </a:t>
+            </a:r>
+            <a:r>
+              <a:rPr lang="en-US" sz="3600" b="1" dirty="0">
+                <a:solidFill>
+                  <a:srgbClr val="660033"/>
+                </a:solidFill>
+                <a:latin typeface="Microsoft JhengHei" panose="020B0604030504040204" pitchFamily="34" charset="-120"/>
+                <a:ea typeface="Microsoft JhengHei" panose="020B0604030504040204" pitchFamily="34" charset="-120"/>
+              </a:rPr>
+              <a:t>1 )</a:t>
+            </a:r>
+            <a:endParaRPr lang="vi-VN" sz="3600" b="1" dirty="0">
               <a:solidFill>
                 <a:srgbClr val="660033"/>
               </a:solidFill>
+              <a:ea typeface="Microsoft JhengHei" panose="020B0604030504040204" pitchFamily="34" charset="-120"/>
             </a:endParaRPr>
           </a:p>
         </p:txBody>
@@ -3594,13 +3603,6 @@
               </a:rPr>
               <a:t>凡有氣息的都要讚美祂</a:t>
             </a:r>
-            <a:endParaRPr lang="zh-TW" altLang="en-US" sz="6400" b="1" dirty="0">
-              <a:solidFill>
-                <a:srgbClr val="660033"/>
-              </a:solidFill>
-              <a:latin typeface="微軟正黑體" pitchFamily="34" charset="-120"/>
-              <a:ea typeface="微軟正黑體" pitchFamily="34" charset="-120"/>
-            </a:endParaRPr>
           </a:p>
         </p:txBody>
       </p:sp>
@@ -3613,7 +3615,7 @@
         <p:spPr>
           <a:xfrm>
             <a:off x="0" y="5061182"/>
-            <a:ext cx="12192000" cy="830997"/>
+            <a:ext cx="12192000" cy="646331"/>
           </a:xfrm>
           <a:prstGeom prst="rect">
             <a:avLst/>
@@ -3628,17 +3630,40 @@
           <a:p>
             <a:pPr algn="ctr"/>
             <a:r>
-              <a:rPr lang="en-US" sz="4800" b="1" dirty="0">
+              <a:rPr lang="en-US" sz="3600" b="1" dirty="0">
                 <a:solidFill>
                   <a:srgbClr val="660033"/>
                 </a:solidFill>
+                <a:latin typeface="Microsoft JhengHei" panose="020B0604030504040204" pitchFamily="34" charset="-120"/>
+                <a:ea typeface="Microsoft JhengHei" panose="020B0604030504040204" pitchFamily="34" charset="-120"/>
               </a:rPr>
-              <a:t>( 1 )</a:t>
-            </a:r>
-            <a:endParaRPr lang="vi-VN" sz="4800" b="1" dirty="0">
+              <a:t>( </a:t>
+            </a:r>
+            <a:r>
+              <a:rPr lang="zh-CN" altLang="en-US" sz="3600" b="1" dirty="0">
+                <a:solidFill>
+                  <a:srgbClr val="660033"/>
+                </a:solidFill>
+                <a:latin typeface="Microsoft JhengHei" panose="020B0604030504040204" pitchFamily="34" charset="-120"/>
+                <a:ea typeface="Microsoft JhengHei" panose="020B0604030504040204" pitchFamily="34" charset="-120"/>
+              </a:rPr>
+              <a:t>副歌 </a:t>
+            </a:r>
+            <a:r>
+              <a:rPr lang="en-US" sz="3600" b="1" dirty="0">
+                <a:solidFill>
+                  <a:srgbClr val="660033"/>
+                </a:solidFill>
+                <a:latin typeface="Microsoft JhengHei" panose="020B0604030504040204" pitchFamily="34" charset="-120"/>
+                <a:ea typeface="Microsoft JhengHei" panose="020B0604030504040204" pitchFamily="34" charset="-120"/>
+              </a:rPr>
+              <a:t>1 )</a:t>
+            </a:r>
+            <a:endParaRPr lang="vi-VN" sz="3600" b="1" dirty="0">
               <a:solidFill>
                 <a:srgbClr val="660033"/>
               </a:solidFill>
+              <a:ea typeface="Microsoft JhengHei" panose="020B0604030504040204" pitchFamily="34" charset="-120"/>
             </a:endParaRPr>
           </a:p>
         </p:txBody>
@@ -3723,13 +3748,6 @@
               </a:rPr>
               <a:t>來敞開胸懷讚美祂</a:t>
             </a:r>
-            <a:endParaRPr lang="zh-TW" altLang="en-US" sz="6400" b="1" dirty="0">
-              <a:solidFill>
-                <a:srgbClr val="660033"/>
-              </a:solidFill>
-              <a:latin typeface="微軟正黑體" pitchFamily="34" charset="-120"/>
-              <a:ea typeface="微軟正黑體" pitchFamily="34" charset="-120"/>
-            </a:endParaRPr>
           </a:p>
         </p:txBody>
       </p:sp>
@@ -3742,7 +3760,7 @@
         <p:spPr>
           <a:xfrm>
             <a:off x="0" y="5061182"/>
-            <a:ext cx="12192000" cy="830997"/>
+            <a:ext cx="12192000" cy="646331"/>
           </a:xfrm>
           <a:prstGeom prst="rect">
             <a:avLst/>
@@ -3757,17 +3775,40 @@
           <a:p>
             <a:pPr algn="ctr"/>
             <a:r>
-              <a:rPr lang="en-US" sz="4800" b="1" dirty="0">
+              <a:rPr lang="en-US" sz="3600" b="1" dirty="0">
                 <a:solidFill>
                   <a:srgbClr val="660033"/>
                 </a:solidFill>
+                <a:latin typeface="Microsoft JhengHei" panose="020B0604030504040204" pitchFamily="34" charset="-120"/>
+                <a:ea typeface="Microsoft JhengHei" panose="020B0604030504040204" pitchFamily="34" charset="-120"/>
               </a:rPr>
-              <a:t>( 2 )</a:t>
-            </a:r>
-            <a:endParaRPr lang="vi-VN" sz="4800" b="1" dirty="0">
+              <a:t>( </a:t>
+            </a:r>
+            <a:r>
+              <a:rPr lang="zh-CN" altLang="en-US" sz="3600" b="1" dirty="0">
+                <a:solidFill>
+                  <a:srgbClr val="660033"/>
+                </a:solidFill>
+                <a:latin typeface="Microsoft JhengHei" panose="020B0604030504040204" pitchFamily="34" charset="-120"/>
+                <a:ea typeface="Microsoft JhengHei" panose="020B0604030504040204" pitchFamily="34" charset="-120"/>
+              </a:rPr>
+              <a:t>正歌 </a:t>
+            </a:r>
+            <a:r>
+              <a:rPr lang="en-US" sz="3600" b="1" dirty="0">
+                <a:solidFill>
+                  <a:srgbClr val="660033"/>
+                </a:solidFill>
+                <a:latin typeface="Microsoft JhengHei" panose="020B0604030504040204" pitchFamily="34" charset="-120"/>
+                <a:ea typeface="Microsoft JhengHei" panose="020B0604030504040204" pitchFamily="34" charset="-120"/>
+              </a:rPr>
+              <a:t>2 )</a:t>
+            </a:r>
+            <a:endParaRPr lang="vi-VN" sz="3600" b="1" dirty="0">
               <a:solidFill>
                 <a:srgbClr val="660033"/>
               </a:solidFill>
+              <a:ea typeface="Microsoft JhengHei" panose="020B0604030504040204" pitchFamily="34" charset="-120"/>
             </a:endParaRPr>
           </a:p>
         </p:txBody>
@@ -3852,13 +3893,6 @@
               </a:rPr>
               <a:t>來高聲歡呼讚美祂</a:t>
             </a:r>
-            <a:endParaRPr lang="zh-TW" altLang="en-US" sz="6400" b="1" dirty="0">
-              <a:solidFill>
-                <a:srgbClr val="660033"/>
-              </a:solidFill>
-              <a:latin typeface="微軟正黑體" pitchFamily="34" charset="-120"/>
-              <a:ea typeface="微軟正黑體" pitchFamily="34" charset="-120"/>
-            </a:endParaRPr>
           </a:p>
         </p:txBody>
       </p:sp>
@@ -3871,7 +3905,7 @@
         <p:spPr>
           <a:xfrm>
             <a:off x="0" y="5061182"/>
-            <a:ext cx="12192000" cy="830997"/>
+            <a:ext cx="12192000" cy="646331"/>
           </a:xfrm>
           <a:prstGeom prst="rect">
             <a:avLst/>
@@ -3886,17 +3920,40 @@
           <a:p>
             <a:pPr algn="ctr"/>
             <a:r>
-              <a:rPr lang="en-US" sz="4800" b="1" dirty="0">
+              <a:rPr lang="en-US" sz="3600" b="1" dirty="0">
                 <a:solidFill>
                   <a:srgbClr val="660033"/>
                 </a:solidFill>
+                <a:latin typeface="Microsoft JhengHei" panose="020B0604030504040204" pitchFamily="34" charset="-120"/>
+                <a:ea typeface="Microsoft JhengHei" panose="020B0604030504040204" pitchFamily="34" charset="-120"/>
               </a:rPr>
-              <a:t>( 2 )</a:t>
-            </a:r>
-            <a:endParaRPr lang="vi-VN" sz="4800" b="1" dirty="0">
+              <a:t>( </a:t>
+            </a:r>
+            <a:r>
+              <a:rPr lang="zh-CN" altLang="en-US" sz="3600" b="1" dirty="0">
+                <a:solidFill>
+                  <a:srgbClr val="660033"/>
+                </a:solidFill>
+                <a:latin typeface="Microsoft JhengHei" panose="020B0604030504040204" pitchFamily="34" charset="-120"/>
+                <a:ea typeface="Microsoft JhengHei" panose="020B0604030504040204" pitchFamily="34" charset="-120"/>
+              </a:rPr>
+              <a:t>正歌 </a:t>
+            </a:r>
+            <a:r>
+              <a:rPr lang="en-US" sz="3600" b="1" dirty="0">
+                <a:solidFill>
+                  <a:srgbClr val="660033"/>
+                </a:solidFill>
+                <a:latin typeface="Microsoft JhengHei" panose="020B0604030504040204" pitchFamily="34" charset="-120"/>
+                <a:ea typeface="Microsoft JhengHei" panose="020B0604030504040204" pitchFamily="34" charset="-120"/>
+              </a:rPr>
+              <a:t>2 )</a:t>
+            </a:r>
+            <a:endParaRPr lang="vi-VN" sz="3600" b="1" dirty="0">
               <a:solidFill>
                 <a:srgbClr val="660033"/>
               </a:solidFill>
+              <a:ea typeface="Microsoft JhengHei" panose="020B0604030504040204" pitchFamily="34" charset="-120"/>
             </a:endParaRPr>
           </a:p>
         </p:txBody>
@@ -3981,13 +4038,6 @@
               </a:rPr>
               <a:t>我們來擊鼓跳舞讚美祂</a:t>
             </a:r>
-            <a:endParaRPr lang="zh-TW" altLang="en-US" sz="6400" b="1" dirty="0">
-              <a:solidFill>
-                <a:srgbClr val="660033"/>
-              </a:solidFill>
-              <a:latin typeface="微軟正黑體" pitchFamily="34" charset="-120"/>
-              <a:ea typeface="微軟正黑體" pitchFamily="34" charset="-120"/>
-            </a:endParaRPr>
           </a:p>
         </p:txBody>
       </p:sp>
@@ -4000,7 +4050,7 @@
         <p:spPr>
           <a:xfrm>
             <a:off x="0" y="5061182"/>
-            <a:ext cx="12192000" cy="830997"/>
+            <a:ext cx="12192000" cy="646331"/>
           </a:xfrm>
           <a:prstGeom prst="rect">
             <a:avLst/>
@@ -4015,17 +4065,40 @@
           <a:p>
             <a:pPr algn="ctr"/>
             <a:r>
-              <a:rPr lang="en-US" sz="4800" b="1" dirty="0">
+              <a:rPr lang="en-US" sz="3600" b="1" dirty="0">
                 <a:solidFill>
                   <a:srgbClr val="660033"/>
                 </a:solidFill>
+                <a:latin typeface="Microsoft JhengHei" panose="020B0604030504040204" pitchFamily="34" charset="-120"/>
+                <a:ea typeface="Microsoft JhengHei" panose="020B0604030504040204" pitchFamily="34" charset="-120"/>
               </a:rPr>
-              <a:t>( 2 )</a:t>
-            </a:r>
-            <a:endParaRPr lang="vi-VN" sz="4800" b="1" dirty="0">
+              <a:t>( </a:t>
+            </a:r>
+            <a:r>
+              <a:rPr lang="zh-CN" altLang="en-US" sz="3600" b="1" dirty="0">
+                <a:solidFill>
+                  <a:srgbClr val="660033"/>
+                </a:solidFill>
+                <a:latin typeface="Microsoft JhengHei" panose="020B0604030504040204" pitchFamily="34" charset="-120"/>
+                <a:ea typeface="Microsoft JhengHei" panose="020B0604030504040204" pitchFamily="34" charset="-120"/>
+              </a:rPr>
+              <a:t>副歌 </a:t>
+            </a:r>
+            <a:r>
+              <a:rPr lang="en-US" sz="3600" b="1" dirty="0">
+                <a:solidFill>
+                  <a:srgbClr val="660033"/>
+                </a:solidFill>
+                <a:latin typeface="Microsoft JhengHei" panose="020B0604030504040204" pitchFamily="34" charset="-120"/>
+                <a:ea typeface="Microsoft JhengHei" panose="020B0604030504040204" pitchFamily="34" charset="-120"/>
+              </a:rPr>
+              <a:t>2 )</a:t>
+            </a:r>
+            <a:endParaRPr lang="vi-VN" sz="3600" b="1" dirty="0">
               <a:solidFill>
                 <a:srgbClr val="660033"/>
               </a:solidFill>
+              <a:ea typeface="Microsoft JhengHei" panose="020B0604030504040204" pitchFamily="34" charset="-120"/>
             </a:endParaRPr>
           </a:p>
         </p:txBody>
@@ -4110,13 +4183,6 @@
               </a:rPr>
               <a:t>凡有氣息的都要讚美祂</a:t>
             </a:r>
-            <a:endParaRPr lang="zh-TW" altLang="en-US" sz="6400" b="1" dirty="0">
-              <a:solidFill>
-                <a:srgbClr val="660033"/>
-              </a:solidFill>
-              <a:latin typeface="微軟正黑體" pitchFamily="34" charset="-120"/>
-              <a:ea typeface="微軟正黑體" pitchFamily="34" charset="-120"/>
-            </a:endParaRPr>
           </a:p>
         </p:txBody>
       </p:sp>
@@ -4129,7 +4195,7 @@
         <p:spPr>
           <a:xfrm>
             <a:off x="0" y="5061182"/>
-            <a:ext cx="12192000" cy="830997"/>
+            <a:ext cx="12192000" cy="646331"/>
           </a:xfrm>
           <a:prstGeom prst="rect">
             <a:avLst/>
@@ -4144,17 +4210,40 @@
           <a:p>
             <a:pPr algn="ctr"/>
             <a:r>
-              <a:rPr lang="en-US" sz="4800" b="1" dirty="0">
+              <a:rPr lang="en-US" sz="3600" b="1" dirty="0">
                 <a:solidFill>
                   <a:srgbClr val="660033"/>
                 </a:solidFill>
+                <a:latin typeface="Microsoft JhengHei" panose="020B0604030504040204" pitchFamily="34" charset="-120"/>
+                <a:ea typeface="Microsoft JhengHei" panose="020B0604030504040204" pitchFamily="34" charset="-120"/>
               </a:rPr>
-              <a:t>( 2 )</a:t>
-            </a:r>
-            <a:endParaRPr lang="vi-VN" sz="4800" b="1" dirty="0">
+              <a:t>( </a:t>
+            </a:r>
+            <a:r>
+              <a:rPr lang="zh-CN" altLang="en-US" sz="3600" b="1" dirty="0">
+                <a:solidFill>
+                  <a:srgbClr val="660033"/>
+                </a:solidFill>
+                <a:latin typeface="Microsoft JhengHei" panose="020B0604030504040204" pitchFamily="34" charset="-120"/>
+                <a:ea typeface="Microsoft JhengHei" panose="020B0604030504040204" pitchFamily="34" charset="-120"/>
+              </a:rPr>
+              <a:t>副歌 </a:t>
+            </a:r>
+            <a:r>
+              <a:rPr lang="en-US" sz="3600" b="1" dirty="0">
+                <a:solidFill>
+                  <a:srgbClr val="660033"/>
+                </a:solidFill>
+                <a:latin typeface="Microsoft JhengHei" panose="020B0604030504040204" pitchFamily="34" charset="-120"/>
+                <a:ea typeface="Microsoft JhengHei" panose="020B0604030504040204" pitchFamily="34" charset="-120"/>
+              </a:rPr>
+              <a:t>2 )</a:t>
+            </a:r>
+            <a:endParaRPr lang="vi-VN" sz="3600" b="1" dirty="0">
               <a:solidFill>
                 <a:srgbClr val="660033"/>
               </a:solidFill>
+              <a:ea typeface="Microsoft JhengHei" panose="020B0604030504040204" pitchFamily="34" charset="-120"/>
             </a:endParaRPr>
           </a:p>
         </p:txBody>
